--- a/docs/presentation/집캐치_IR.pptx
+++ b/docs/presentation/집캐치_IR.pptx
@@ -1771,7 +1771,7 @@
                 <a:ea typeface="Pretendard" pitchFamily="34" charset="-122"/>
                 <a:cs typeface="Pretendard" pitchFamily="34" charset="-120"/>
               </a:rPr>
-              <a:t>청약·공공임대 공고를 찾는 일반 소비자를 위한 서비스</a:t>
+              <a:t>청약 · 공공임대 통합 탐색 서비스</a:t>
             </a:r>
             <a:endParaRPr lang="en-US" sz="2200" dirty="0"/>
           </a:p>
@@ -1810,7 +1810,7 @@
                 <a:ea typeface="Pretendard" pitchFamily="34" charset="-122"/>
                 <a:cs typeface="Pretendard" pitchFamily="34" charset="-120"/>
               </a:rPr>
-              <a:t>조건을 한 번 입력하면 지금 지원할 수 있는 후보를 정리해 준다</a:t>
+              <a:t>조건 입력 1회로 지원 가능 공고를 선별합니다</a:t>
             </a:r>
             <a:endParaRPr lang="en-US" sz="1600" dirty="0"/>
           </a:p>
@@ -1872,7 +1872,7 @@
                 <a:ea typeface="Pretendard" pitchFamily="34" charset="-122"/>
                 <a:cs typeface="Pretendard" pitchFamily="34" charset="-120"/>
               </a:rPr>
-              <a:t>청약홈 · LH청약플러스 공공데이터   |   IR 핵심 요약</a:t>
+              <a:t>청약홈 · LH청약플러스 공공데이터 기반   |   IR 요약자료</a:t>
             </a:r>
             <a:endParaRPr lang="en-US" sz="1300" dirty="0"/>
           </a:p>
@@ -1966,7 +1966,7 @@
                 <a:ea typeface="Pretendard" pitchFamily="34" charset="-122"/>
                 <a:cs typeface="Pretendard" pitchFamily="34" charset="-120"/>
               </a:rPr>
-              <a:t>공고는 이미 공개돼 있습니다</a:t>
+              <a:t>공고는 이미 공개되어 있습니다</a:t>
             </a:r>
             <a:endParaRPr lang="en-US" sz="1900" dirty="0"/>
           </a:p>
@@ -2008,7 +2008,7 @@
                 <a:ea typeface="Pretendard" pitchFamily="34" charset="-122"/>
                 <a:cs typeface="Pretendard" pitchFamily="34" charset="-120"/>
               </a:rPr>
-              <a:t>없는 것은 정보가 아니라</a:t>
+              <a:t>부재한 것은 정보가 아니라</a:t>
             </a:r>
             <a:endParaRPr lang="en-US" sz="4200" dirty="0"/>
           </a:p>
@@ -2028,7 +2028,7 @@
                 <a:ea typeface="Pretendard" pitchFamily="34" charset="-122"/>
                 <a:cs typeface="Pretendard" pitchFamily="34" charset="-120"/>
               </a:rPr>
-              <a:t>내 것을 고르는 기준입니다</a:t>
+              <a:t>선별의 기준입니다</a:t>
             </a:r>
             <a:endParaRPr lang="en-US" sz="4200" dirty="0"/>
           </a:p>
@@ -2067,7 +2067,7 @@
                 <a:ea typeface="Pretendard" pitchFamily="34" charset="-122"/>
                 <a:cs typeface="Pretendard" pitchFamily="34" charset="-120"/>
               </a:rPr>
-              <a:t>집캐치는 그 기준을 만듭니다</a:t>
+              <a:t>집캐치는 그 기준을 제공합니다</a:t>
             </a:r>
             <a:endParaRPr lang="en-US" sz="2000" dirty="0"/>
           </a:p>
@@ -2239,7 +2239,7 @@
                 <a:ea typeface="Pretendard" pitchFamily="34" charset="-122"/>
                 <a:cs typeface="Pretendard" pitchFamily="34" charset="-120"/>
               </a:rPr>
-              <a:t>공개돼 있지만, 내 것을 못 고른다</a:t>
+              <a:t>공고는 공개, 판단은 부재</a:t>
             </a:r>
             <a:endParaRPr lang="en-US" sz="3800" dirty="0"/>
           </a:p>
@@ -2278,7 +2278,7 @@
                 <a:ea typeface="Pretendard" pitchFamily="34" charset="-122"/>
                 <a:cs typeface="Pretendard" pitchFamily="34" charset="-120"/>
               </a:rPr>
-              <a:t>공고는 청약홈·LH에 다 있다. 없는 것은 "나에게 맞는가"에 대한 답이다</a:t>
+              <a:t>공고는 전량 공개되어 있으나, 개인 조건 기준의 선별 수단이 존재하지 않습니다</a:t>
             </a:r>
             <a:endParaRPr lang="en-US" sz="1500" dirty="0"/>
           </a:p>
@@ -2383,7 +2383,7 @@
                 <a:ea typeface="Pretendard" pitchFamily="34" charset="-122"/>
                 <a:cs typeface="Pretendard" pitchFamily="34" charset="-120"/>
               </a:rPr>
-              <a:t>찾는 곳이 다르다</a:t>
+              <a:t>출처 분산</a:t>
             </a:r>
             <a:endParaRPr lang="en-US" sz="2000" dirty="0"/>
           </a:p>
@@ -2425,7 +2425,7 @@
                 <a:ea typeface="Pretendard" pitchFamily="34" charset="-122"/>
                 <a:cs typeface="Pretendard" pitchFamily="34" charset="-120"/>
               </a:rPr>
-              <a:t>분양은 청약홈, 임대는 LH청약플러스.</a:t>
+              <a:t>분양은 청약홈, 임대는 LH청약플러스로</a:t>
             </a:r>
             <a:endParaRPr lang="en-US" sz="1350" dirty="0"/>
           </a:p>
@@ -2445,7 +2445,7 @@
                 <a:ea typeface="Pretendard" pitchFamily="34" charset="-122"/>
                 <a:cs typeface="Pretendard" pitchFamily="34" charset="-120"/>
               </a:rPr>
-              <a:t>한 사람이 두 곳을 오간다</a:t>
+              <a:t>이원화. 단일 조회 수단 부재</a:t>
             </a:r>
             <a:endParaRPr lang="en-US" sz="1350" dirty="0"/>
           </a:p>
@@ -2550,7 +2550,7 @@
                 <a:ea typeface="Pretendard" pitchFamily="34" charset="-122"/>
                 <a:cs typeface="Pretendard" pitchFamily="34" charset="-120"/>
               </a:rPr>
-              <a:t>조건이 안 걸린다</a:t>
+              <a:t>선별 기능 부재</a:t>
             </a:r>
             <a:endParaRPr lang="en-US" sz="2000" dirty="0"/>
           </a:p>
@@ -2592,7 +2592,7 @@
                 <a:ea typeface="Pretendard" pitchFamily="34" charset="-122"/>
                 <a:cs typeface="Pretendard" pitchFamily="34" charset="-120"/>
               </a:rPr>
-              <a:t>지역·예산·면적·가구형태를 넣어</a:t>
+              <a:t>지역 · 예산 · 면적 · 가구형태 기준</a:t>
             </a:r>
             <a:endParaRPr lang="en-US" sz="1350" dirty="0"/>
           </a:p>
@@ -2612,7 +2612,7 @@
                 <a:ea typeface="Pretendard" pitchFamily="34" charset="-122"/>
                 <a:cs typeface="Pretendard" pitchFamily="34" charset="-120"/>
               </a:rPr>
-              <a:t>걸러주는 화면이 없다</a:t>
+              <a:t>후보 선별 기능 미제공</a:t>
             </a:r>
             <a:endParaRPr lang="en-US" sz="1350" dirty="0"/>
           </a:p>
@@ -2717,7 +2717,7 @@
                 <a:ea typeface="Pretendard" pitchFamily="34" charset="-122"/>
                 <a:cs typeface="Pretendard" pitchFamily="34" charset="-120"/>
               </a:rPr>
-              <a:t>일정이 흩어진다</a:t>
+              <a:t>일정 관리 공백</a:t>
             </a:r>
             <a:endParaRPr lang="en-US" sz="2000" dirty="0"/>
           </a:p>
@@ -2759,7 +2759,7 @@
                 <a:ea typeface="Pretendard" pitchFamily="34" charset="-122"/>
                 <a:cs typeface="Pretendard" pitchFamily="34" charset="-120"/>
               </a:rPr>
-              <a:t>접수·서류·발표·계약이</a:t>
+              <a:t>접수 · 서류 · 발표 · 계약 일정이</a:t>
             </a:r>
             <a:endParaRPr lang="en-US" sz="1350" dirty="0"/>
           </a:p>
@@ -2779,7 +2779,7 @@
                 <a:ea typeface="Pretendard" pitchFamily="34" charset="-122"/>
                 <a:cs typeface="Pretendard" pitchFamily="34" charset="-120"/>
               </a:rPr>
-              <a:t>공고문 안에만 적혀 있다</a:t>
+              <a:t>공고문 내부에만 존재</a:t>
             </a:r>
             <a:endParaRPr lang="en-US" sz="1350" dirty="0"/>
           </a:p>
@@ -2845,7 +2845,7 @@
                 <a:ea typeface="Pretendard" pitchFamily="34" charset="-122"/>
                 <a:cs typeface="Pretendard" pitchFamily="34" charset="-120"/>
               </a:rPr>
-              <a:t>정보가 없는 게 아니라, 판단이 없다</a:t>
+              <a:t>정보 접근성이 아닌 판단 지원의 부재</a:t>
             </a:r>
             <a:endParaRPr lang="en-US" sz="1900" dirty="0"/>
           </a:p>
@@ -3056,7 +3056,7 @@
                 <a:ea typeface="Pretendard" pitchFamily="34" charset="-122"/>
                 <a:cs typeface="Pretendard" pitchFamily="34" charset="-120"/>
               </a:rPr>
-              <a:t>조건 한 번, 후보 정리</a:t>
+              <a:t>조건 입력 1회 → 지원 가능 후보 선별</a:t>
             </a:r>
             <a:endParaRPr lang="en-US" sz="3800" dirty="0"/>
           </a:p>
@@ -3095,7 +3095,7 @@
                 <a:ea typeface="Pretendard" pitchFamily="34" charset="-122"/>
                 <a:cs typeface="Pretendard" pitchFamily="34" charset="-120"/>
               </a:rPr>
-              <a:t>같은 공고 데이터, 다른 결과물</a:t>
+              <a:t>동일한 공고 데이터에서 검증 가능한 판단 근거를 생성합니다</a:t>
             </a:r>
             <a:endParaRPr lang="en-US" sz="1500" dirty="0"/>
           </a:p>
@@ -3450,7 +3450,7 @@
                 <a:ea typeface="Pretendard" pitchFamily="34" charset="-122"/>
                 <a:cs typeface="Pretendard" pitchFamily="34" charset="-120"/>
               </a:rPr>
-              <a:t>전용 29㎡ — 희망 최소 28㎡보다 1㎡ 넓음</a:t>
+              <a:t>전용 29㎡ — 희망 최소 28㎡ 대비 +1㎡</a:t>
             </a:r>
             <a:endParaRPr lang="en-US" sz="1400" dirty="0"/>
           </a:p>
@@ -3556,7 +3556,7 @@
                 <a:ea typeface="Pretendard" pitchFamily="34" charset="-122"/>
                 <a:cs typeface="Pretendard" pitchFamily="34" charset="-120"/>
               </a:rPr>
-              <a:t>근거는 점수 구간이 아니라 실제 값 차이로 쓴다 — "1㎡ 넓음", "4,800만원 초과"</a:t>
+              <a:t>판단 근거를 점수 구간이 아닌 실측값 차이로 제시 — 「+1㎡」 「4,800만원 초과」</a:t>
             </a:r>
             <a:endParaRPr lang="en-US" sz="1600" dirty="0"/>
           </a:p>
@@ -3767,7 +3767,7 @@
                 <a:ea typeface="Pretendard" pitchFamily="34" charset="-122"/>
                 <a:cs typeface="Pretendard" pitchFamily="34" charset="-120"/>
               </a:rPr>
-              <a:t>소비자는 여섯 걸음만 걷는다</a:t>
+              <a:t>6단계 사용자 여정</a:t>
             </a:r>
             <a:endParaRPr lang="en-US" sz="3800" dirty="0"/>
           </a:p>
@@ -3806,7 +3806,7 @@
                 <a:ea typeface="Pretendard" pitchFamily="34" charset="-122"/>
                 <a:cs typeface="Pretendard" pitchFamily="34" charset="-120"/>
               </a:rPr>
-              <a:t>방문 → 조건 입력 → 후보 확인 → 관심·알림 → 가입 → 재방문</a:t>
+              <a:t>방문부터 재방문까지 단일 흐름으로 설계</a:t>
             </a:r>
             <a:endParaRPr lang="en-US" sz="1500" dirty="0"/>
           </a:p>
@@ -3989,7 +3989,7 @@
                 <a:ea typeface="Pretendard" pitchFamily="34" charset="-122"/>
                 <a:cs typeface="Pretendard" pitchFamily="34" charset="-120"/>
               </a:rPr>
-              <a:t>공고 없이도 무엇을 해주는지 보인다</a:t>
+              <a:t>공고 열람 전 서비스 가치 인지</a:t>
             </a:r>
             <a:endParaRPr lang="en-US" sz="1300" dirty="0"/>
           </a:p>
@@ -4172,7 +4172,7 @@
                 <a:ea typeface="Pretendard" pitchFamily="34" charset="-122"/>
                 <a:cs typeface="Pretendard" pitchFamily="34" charset="-120"/>
               </a:rPr>
-              <a:t>지역 → 주거비 → 가구·선호 3단계</a:t>
+              <a:t>지역 → 주거비 → 가구 · 선호 3단계</a:t>
             </a:r>
             <a:endParaRPr lang="en-US" sz="1300" dirty="0"/>
           </a:p>
@@ -4355,7 +4355,7 @@
                 <a:ea typeface="Pretendard" pitchFamily="34" charset="-122"/>
                 <a:cs typeface="Pretendard" pitchFamily="34" charset="-120"/>
               </a:rPr>
-              <a:t>조건 충족 / 예산 초과를 분리해 보여준다</a:t>
+              <a:t>조건 충족 · 예산 초과 분리 제시</a:t>
             </a:r>
             <a:endParaRPr lang="en-US" sz="1300" dirty="0"/>
           </a:p>
@@ -4460,7 +4460,7 @@
                 <a:ea typeface="Pretendard" pitchFamily="34" charset="-122"/>
                 <a:cs typeface="Pretendard" pitchFamily="34" charset="-120"/>
               </a:rPr>
-              <a:t>관심·알림</a:t>
+              <a:t>관심 · 알림</a:t>
             </a:r>
             <a:endParaRPr lang="en-US" sz="1800" dirty="0"/>
           </a:p>
@@ -4538,7 +4538,7 @@
                 <a:ea typeface="Pretendard" pitchFamily="34" charset="-122"/>
                 <a:cs typeface="Pretendard" pitchFamily="34" charset="-120"/>
               </a:rPr>
-              <a:t>관심공고 저장, 알림 수신 선택</a:t>
+              <a:t>관심공고 저장 및 알림 수신 설정</a:t>
             </a:r>
             <a:endParaRPr lang="en-US" sz="1300" dirty="0"/>
           </a:p>
@@ -4721,7 +4721,7 @@
                 <a:ea typeface="Pretendard" pitchFamily="34" charset="-122"/>
                 <a:cs typeface="Pretendard" pitchFamily="34" charset="-120"/>
               </a:rPr>
-              <a:t>이메일로 계정 생성</a:t>
+              <a:t>이메일 기반 계정 생성</a:t>
             </a:r>
             <a:endParaRPr lang="en-US" sz="1300" dirty="0"/>
           </a:p>
@@ -4904,7 +4904,7 @@
                 <a:ea typeface="Pretendard" pitchFamily="34" charset="-122"/>
                 <a:cs typeface="Pretendard" pitchFamily="34" charset="-120"/>
               </a:rPr>
-              <a:t>새 공고·마감 임박이 오면 다시 들어온다</a:t>
+              <a:t>신규 공고 · 마감 임박 알림으로 재유입</a:t>
             </a:r>
             <a:endParaRPr lang="en-US" sz="1300" dirty="0"/>
           </a:p>
@@ -4943,7 +4943,7 @@
                 <a:ea typeface="Pretendard" pitchFamily="34" charset="-122"/>
                 <a:cs typeface="Pretendard" pitchFamily="34" charset="-120"/>
               </a:rPr>
-              <a:t>CRM은 사업자가 내부에서 쓰는 자산이다. 소비자에게 파는 관리도구가 아니다.</a:t>
+              <a:t>CRM은 내부 운영 자산이며 소비자 판매 상품이 아님</a:t>
             </a:r>
             <a:endParaRPr lang="en-US" sz="1300" dirty="0"/>
           </a:p>
@@ -5154,7 +5154,7 @@
                 <a:ea typeface="Pretendard" pitchFamily="34" charset="-122"/>
                 <a:cs typeface="Pretendard" pitchFamily="34" charset="-120"/>
               </a:rPr>
-              <a:t>네 가지를 섞지 않는다</a:t>
+              <a:t>4축 분리 판정 구조</a:t>
             </a:r>
             <a:endParaRPr lang="en-US" sz="3800" dirty="0"/>
           </a:p>
@@ -5193,7 +5193,7 @@
                 <a:ea typeface="Pretendard" pitchFamily="34" charset="-122"/>
                 <a:cs typeface="Pretendard" pitchFamily="34" charset="-120"/>
               </a:rPr>
-              <a:t>하나의 점수로 합치면 "예산 초과인데 점수가 높은" 결과가 나온다</a:t>
+              <a:t>단일 점수 통합 시 예산 초과 건이 상위 노출되는 구조적 오류가 발생합니다</a:t>
             </a:r>
             <a:endParaRPr lang="en-US" sz="1500" dirty="0"/>
           </a:p>
@@ -5360,7 +5360,7 @@
                 <a:ea typeface="Pretendard" pitchFamily="34" charset="-122"/>
                 <a:cs typeface="Pretendard" pitchFamily="34" charset="-120"/>
               </a:rPr>
-              <a:t>자격 엔진 전까지 전부 UNKNOWN</a:t>
+              <a:t>자격 엔진 도입 전 전 건 UNKNOWN 처리</a:t>
             </a:r>
             <a:endParaRPr lang="en-US" sz="1350" dirty="0"/>
           </a:p>
@@ -5380,7 +5380,7 @@
                 <a:ea typeface="Pretendard" pitchFamily="34" charset="-122"/>
                 <a:cs typeface="Pretendard" pitchFamily="34" charset="-120"/>
               </a:rPr>
-              <a:t>미확인을 불충족으로 단정하지 않는다</a:t>
+              <a:t>미확인을 불충족으로 단정하지 않음</a:t>
             </a:r>
             <a:endParaRPr lang="en-US" sz="1350" dirty="0"/>
           </a:p>
@@ -5547,7 +5547,7 @@
                 <a:ea typeface="Pretendard" pitchFamily="34" charset="-122"/>
                 <a:cs typeface="Pretendard" pitchFamily="34" charset="-120"/>
               </a:rPr>
-              <a:t>기본 후보의 필수조건</a:t>
+              <a:t>기본 후보의 필수 조건</a:t>
             </a:r>
             <a:endParaRPr lang="en-US" sz="1350" dirty="0"/>
           </a:p>
@@ -5567,7 +5567,7 @@
                 <a:ea typeface="Pretendard" pitchFamily="34" charset="-122"/>
                 <a:cs typeface="Pretendard" pitchFamily="34" charset="-120"/>
               </a:rPr>
-              <a:t>초과 건은 초과액과 함께 별도 반환</a:t>
+              <a:t>초과 건은 초과액 명시 후 별도 반환</a:t>
             </a:r>
             <a:endParaRPr lang="en-US" sz="1350" dirty="0"/>
           </a:p>
@@ -5734,7 +5734,7 @@
                 <a:ea typeface="Pretendard" pitchFamily="34" charset="-122"/>
                 <a:cs typeface="Pretendard" pitchFamily="34" charset="-120"/>
               </a:rPr>
-              <a:t>희망과 얼마나 가까운가만 본다</a:t>
+              <a:t>희망 조건과의 근접도만 산출</a:t>
             </a:r>
             <a:endParaRPr lang="en-US" sz="1350" dirty="0"/>
           </a:p>
@@ -5859,7 +5859,7 @@
                 <a:ea typeface="Pretendard" pitchFamily="34" charset="-122"/>
                 <a:cs typeface="Pretendard" pitchFamily="34" charset="-120"/>
               </a:rPr>
-              <a:t>별도 지표</a:t>
+              <a:t>독립 지표</a:t>
             </a:r>
             <a:endParaRPr lang="en-US" sz="1300" dirty="0"/>
           </a:p>
@@ -5901,7 +5901,7 @@
                 <a:ea typeface="Pretendard" pitchFamily="34" charset="-122"/>
                 <a:cs typeface="Pretendard" pitchFamily="34" charset="-120"/>
               </a:rPr>
-              <a:t>적합도를 올리지 않는다</a:t>
+              <a:t>적합도 점수에 가산하지 않음</a:t>
             </a:r>
             <a:endParaRPr lang="en-US" sz="1350" dirty="0"/>
           </a:p>
@@ -5940,7 +5940,7 @@
                 <a:ea typeface="Pretendard" pitchFamily="34" charset="-122"/>
                 <a:cs typeface="Pretendard" pitchFamily="34" charset="-120"/>
               </a:rPr>
-              <a:t>화면에서 가장 붉은 것은 항상 마감이다.</a:t>
+              <a:t>화면 내 최고 채도는 마감 정보에 한정</a:t>
             </a:r>
             <a:endParaRPr lang="en-US" sz="1300" dirty="0"/>
           </a:p>
@@ -6151,7 +6151,7 @@
                 <a:ea typeface="Pretendard" pitchFamily="34" charset="-122"/>
                 <a:cs typeface="Pretendard" pitchFamily="34" charset="-120"/>
               </a:rPr>
-              <a:t>만들지 않는 것이 경쟁력이다</a:t>
+              <a:t>데이터 신뢰성 확보 원칙</a:t>
             </a:r>
             <a:endParaRPr lang="en-US" sz="3800" dirty="0"/>
           </a:p>
@@ -6190,7 +6190,7 @@
                 <a:ea typeface="Pretendard" pitchFamily="34" charset="-122"/>
                 <a:cs typeface="Pretendard" pitchFamily="34" charset="-120"/>
               </a:rPr>
-              <a:t>부동산 서비스가 신뢰를 잃는 지점을 먼저 닫았다</a:t>
+              <a:t>부동산 서비스의 신뢰 훼손 요인을 사전 차단합니다</a:t>
             </a:r>
             <a:endParaRPr lang="en-US" sz="1500" dirty="0"/>
           </a:p>
@@ -6295,7 +6295,7 @@
                 <a:ea typeface="Pretendard" pitchFamily="34" charset="-122"/>
                 <a:cs typeface="Pretendard" pitchFamily="34" charset="-120"/>
               </a:rPr>
-              <a:t>당첨 확률을 산출하지 않는다</a:t>
+              <a:t>당첨 확률 미산출</a:t>
             </a:r>
             <a:endParaRPr lang="en-US" sz="1700" dirty="0"/>
           </a:p>
@@ -6337,7 +6337,7 @@
                 <a:ea typeface="Pretendard" pitchFamily="34" charset="-122"/>
                 <a:cs typeface="Pretendard" pitchFamily="34" charset="-120"/>
               </a:rPr>
-              <a:t>과거 당첨가점과의 비교만 제공한다.</a:t>
+              <a:t>공개 데이터 기준 개인별 확률 산출 근거 부재</a:t>
             </a:r>
             <a:endParaRPr lang="en-US" sz="1300" dirty="0"/>
           </a:p>
@@ -6357,7 +6357,7 @@
                 <a:ea typeface="Pretendard" pitchFamily="34" charset="-122"/>
                 <a:cs typeface="Pretendard" pitchFamily="34" charset="-120"/>
               </a:rPr>
-              <a:t>표본이 0이면 임의 평균을 만들지 않고 자료 부족으로 표시한다</a:t>
+              <a:t>과거 당첨가점 비교만 제공, 표본 부재 시 자료 부족 표기</a:t>
             </a:r>
             <a:endParaRPr lang="en-US" sz="1300" dirty="0"/>
           </a:p>
@@ -6462,7 +6462,7 @@
                 <a:ea typeface="Pretendard" pitchFamily="34" charset="-122"/>
                 <a:cs typeface="Pretendard" pitchFamily="34" charset="-120"/>
               </a:rPr>
-              <a:t>없는 값을 채우지 않는다</a:t>
+              <a:t>결측값 미보완</a:t>
             </a:r>
             <a:endParaRPr lang="en-US" sz="1700" dirty="0"/>
           </a:p>
@@ -6504,7 +6504,7 @@
                 <a:ea typeface="Pretendard" pitchFamily="34" charset="-122"/>
                 <a:cs typeface="Pretendard" pitchFamily="34" charset="-120"/>
               </a:rPr>
-              <a:t>청약홈 분양정보에는 전용면적·보증금·월세가 없다.</a:t>
+              <a:t>청약홈 분양정보의 전용면적 · 보증금 · 월임대료는</a:t>
             </a:r>
             <a:endParaRPr lang="en-US" sz="1300" dirty="0"/>
           </a:p>
@@ -6524,7 +6524,7 @@
                 <a:ea typeface="Pretendard" pitchFamily="34" charset="-122"/>
                 <a:cs typeface="Pretendard" pitchFamily="34" charset="-120"/>
               </a:rPr>
-              <a:t>null 로 남기고 "미공개"로 쓴다</a:t>
+              <a:t>null 유지 후 「미공개」로 표기</a:t>
             </a:r>
             <a:endParaRPr lang="en-US" sz="1300" dirty="0"/>
           </a:p>
@@ -6629,7 +6629,7 @@
                 <a:ea typeface="Pretendard" pitchFamily="34" charset="-122"/>
                 <a:cs typeface="Pretendard" pitchFamily="34" charset="-120"/>
               </a:rPr>
-              <a:t>일정을 지어내지 않는다</a:t>
+              <a:t>일정 구분 표기</a:t>
             </a:r>
             <a:endParaRPr lang="en-US" sz="1700" dirty="0"/>
           </a:p>
@@ -6671,7 +6671,7 @@
                 <a:ea typeface="Pretendard" pitchFamily="34" charset="-122"/>
                 <a:cs typeface="Pretendard" pitchFamily="34" charset="-120"/>
               </a:rPr>
-              <a:t>공고 원문의 기한은 OFFICIAL,</a:t>
+              <a:t>공고 원문 기한은 OFFICIAL,</a:t>
             </a:r>
             <a:endParaRPr lang="en-US" sz="1300" dirty="0"/>
           </a:p>
@@ -6691,7 +6691,7 @@
                 <a:ea typeface="Pretendard" pitchFamily="34" charset="-122"/>
                 <a:cs typeface="Pretendard" pitchFamily="34" charset="-120"/>
               </a:rPr>
-              <a:t>역산한 준비일은 RECOMMENDED 로 구분해 표시한다</a:t>
+              <a:t>역산 준비일은 RECOMMENDED 로 구분 표기</a:t>
             </a:r>
             <a:endParaRPr lang="en-US" sz="1300" dirty="0"/>
           </a:p>
@@ -6796,7 +6796,7 @@
                 <a:ea typeface="Pretendard" pitchFamily="34" charset="-122"/>
                 <a:cs typeface="Pretendard" pitchFamily="34" charset="-120"/>
               </a:rPr>
-              <a:t>실패를 예시로 덮지 않는다</a:t>
+              <a:t>수집 실패 미은폐</a:t>
             </a:r>
             <a:endParaRPr lang="en-US" sz="1700" dirty="0"/>
           </a:p>
@@ -6838,7 +6838,7 @@
                 <a:ea typeface="Pretendard" pitchFamily="34" charset="-122"/>
                 <a:cs typeface="Pretendard" pitchFamily="34" charset="-120"/>
               </a:rPr>
-              <a:t>수집이 실패하면 sources[] 에 그대로 보고한다.</a:t>
+              <a:t>수집 실패 시 sources[] 에 원문 그대로 반영</a:t>
             </a:r>
             <a:endParaRPr lang="en-US" sz="1300" dirty="0"/>
           </a:p>
@@ -6858,7 +6858,7 @@
                 <a:ea typeface="Pretendard" pitchFamily="34" charset="-122"/>
                 <a:cs typeface="Pretendard" pitchFamily="34" charset="-120"/>
               </a:rPr>
-              <a:t>합성 데이터로 가리지 않는다</a:t>
+              <a:t>합성 데이터로 대체하지 않음</a:t>
             </a:r>
             <a:endParaRPr lang="en-US" sz="1300" dirty="0"/>
           </a:p>
@@ -7069,7 +7069,7 @@
                 <a:ea typeface="Pretendard" pitchFamily="34" charset="-122"/>
                 <a:cs typeface="Pretendard" pitchFamily="34" charset="-120"/>
               </a:rPr>
-              <a:t>분양과 임대를 한자리에</a:t>
+              <a:t>분양 · 임대 통합 수집</a:t>
             </a:r>
             <a:endParaRPr lang="en-US" sz="3800" dirty="0"/>
           </a:p>
@@ -7108,7 +7108,7 @@
                 <a:ea typeface="Pretendard" pitchFamily="34" charset="-122"/>
                 <a:cs typeface="Pretendard" pitchFamily="34" charset="-120"/>
               </a:rPr>
-              <a:t>한 사람이 두 사이트를 오가지 않게 한다</a:t>
+              <a:t>이원화된 공고 출처를 단일 서비스로 통합합니다</a:t>
             </a:r>
             <a:endParaRPr lang="en-US" sz="1500" dirty="0"/>
           </a:p>
@@ -7501,7 +7501,7 @@
                 <a:ea typeface="Pretendard" pitchFamily="34" charset="-122"/>
                 <a:cs typeface="Pretendard" pitchFamily="34" charset="-120"/>
               </a:rPr>
-              <a:t>직접 올린 공고</a:t>
+              <a:t>운영자 직접 등록 공고</a:t>
             </a:r>
             <a:endParaRPr lang="en-US" sz="1350" dirty="0"/>
           </a:p>
@@ -7540,7 +7540,7 @@
                 <a:ea typeface="Pretendard" pitchFamily="34" charset="-122"/>
                 <a:cs typeface="Pretendard" pitchFamily="34" charset="-120"/>
               </a:rPr>
-              <a:t>운영자 업로드</a:t>
+              <a:t>내부 업로드</a:t>
             </a:r>
             <a:endParaRPr lang="en-US" sz="1200" dirty="0"/>
           </a:p>
@@ -7750,7 +7750,7 @@
                 <a:ea typeface="Pretendard" pitchFamily="34" charset="-122"/>
                 <a:cs typeface="Pretendard" pitchFamily="34" charset="-120"/>
               </a:rPr>
-              <a:t>수집된 실제 공고는 「공식 공고」, 합성 데이터는 「예시 공고」로 화면에 표시한다</a:t>
+              <a:t>수집 공고는 「공식 공고」, 합성 데이터는 「예시 공고」로 구분 표기</a:t>
             </a:r>
             <a:endParaRPr lang="en-US" sz="1350" dirty="0"/>
           </a:p>
@@ -7961,7 +7961,7 @@
                 <a:ea typeface="Pretendard" pitchFamily="34" charset="-122"/>
                 <a:cs typeface="Pretendard" pitchFamily="34" charset="-120"/>
               </a:rPr>
-              <a:t>운영은 사람이 지키지 않는다</a:t>
+              <a:t>CRM 운영 자동화 — Claude Routines 12종</a:t>
             </a:r>
             <a:endParaRPr lang="en-US" sz="3800" dirty="0"/>
           </a:p>
@@ -8000,7 +8000,7 @@
                 <a:ea typeface="Pretendard" pitchFamily="34" charset="-122"/>
                 <a:cs typeface="Pretendard" pitchFamily="34" charset="-120"/>
               </a:rPr>
-              <a:t>Claude Routines 12개가 CRM 운영 업무를 매일 대신 수행한다</a:t>
+              <a:t>일 단위 운영 업무를 정시 자동 수행 구조로 전환</a:t>
             </a:r>
             <a:endParaRPr lang="en-US" sz="1500" dirty="0"/>
           </a:p>
@@ -9180,7 +9180,7 @@
                 <a:ea typeface="Pretendard" pitchFamily="34" charset="-122"/>
                 <a:cs typeface="Pretendard" pitchFamily="34" charset="-120"/>
               </a:rPr>
-              <a:t>Supabase CRM 실데이터 조회</a:t>
+              <a:t>Supabase 실데이터 조회 · Gmail 발송</a:t>
             </a:r>
             <a:endParaRPr lang="en-US" sz="1400" dirty="0"/>
           </a:p>
@@ -9200,7 +9200,7 @@
                 <a:ea typeface="Pretendard" pitchFamily="34" charset="-122"/>
                 <a:cs typeface="Pretendard" pitchFamily="34" charset="-120"/>
               </a:rPr>
-              <a:t>Gmail 실발송 · 실행 이력 누적</a:t>
+              <a:t>실행 이력 자동 적재</a:t>
             </a:r>
             <a:endParaRPr lang="en-US" sz="1400" dirty="0"/>
           </a:p>
@@ -9411,7 +9411,7 @@
                 <a:ea typeface="Pretendard" pitchFamily="34" charset="-122"/>
                 <a:cs typeface="Pretendard" pitchFamily="34" charset="-120"/>
               </a:rPr>
-              <a:t>무료로 모으고, 판단으로 과금하고, 데이터로 번다</a:t>
+              <a:t>3단계 수익화 모델</a:t>
             </a:r>
             <a:endParaRPr lang="en-US" sz="3800" dirty="0"/>
           </a:p>
@@ -9450,7 +9450,7 @@
                 <a:ea typeface="Pretendard" pitchFamily="34" charset="-122"/>
                 <a:cs typeface="Pretendard" pitchFamily="34" charset="-120"/>
               </a:rPr>
-              <a:t>마지막 단계가 실제 매출 축</a:t>
+              <a:t>3단계가 실질 매출 축에 해당합니다</a:t>
             </a:r>
             <a:endParaRPr lang="en-US" sz="1500" dirty="0"/>
           </a:p>
@@ -9597,7 +9597,7 @@
                 <a:ea typeface="Pretendard" pitchFamily="34" charset="-122"/>
                 <a:cs typeface="Pretendard" pitchFamily="34" charset="-120"/>
               </a:rPr>
-              <a:t>전 기능 무료 공개</a:t>
+              <a:t>전 기능 무료 제공</a:t>
             </a:r>
             <a:endParaRPr lang="en-US" sz="1300" dirty="0"/>
           </a:p>
@@ -9617,7 +9617,7 @@
                 <a:ea typeface="Pretendard" pitchFamily="34" charset="-122"/>
                 <a:cs typeface="Pretendard" pitchFamily="34" charset="-120"/>
               </a:rPr>
-              <a:t>조건·관심공고 데이터 확보</a:t>
+              <a:t>조건 · 관심공고 데이터 확보</a:t>
             </a:r>
             <a:endParaRPr lang="en-US" sz="1300" dirty="0"/>
           </a:p>
@@ -9823,7 +9823,7 @@
                 <a:ea typeface="Pretendard" pitchFamily="34" charset="-122"/>
                 <a:cs typeface="Pretendard" pitchFamily="34" charset="-120"/>
               </a:rPr>
-              <a:t>자격 자가진단</a:t>
+              <a:t>자격 자가진단 유료화</a:t>
             </a:r>
             <a:endParaRPr lang="en-US" sz="1300" dirty="0"/>
           </a:p>
@@ -10029,7 +10029,7 @@
                 <a:ea typeface="Pretendard" pitchFamily="34" charset="-122"/>
                 <a:cs typeface="Pretendard" pitchFamily="34" charset="-120"/>
               </a:rPr>
-              <a:t>수요·조건 분포 분석</a:t>
+              <a:t>수요 · 조건 분포 분석 제공</a:t>
             </a:r>
             <a:endParaRPr lang="en-US" sz="1300" dirty="0"/>
           </a:p>
@@ -10107,7 +10107,7 @@
                 <a:ea typeface="Pretendard" pitchFamily="34" charset="-122"/>
                 <a:cs typeface="Pretendard" pitchFamily="34" charset="-120"/>
               </a:rPr>
-              <a:t>사용자가 남긴 조건·관심공고는 경쟁사가 복제할 수 없는 자산이 된다</a:t>
+              <a:t>축적된 조건 · 관심공고 데이터는 경쟁사 복제가 불가능한 자산</a:t>
             </a:r>
             <a:endParaRPr lang="en-US" sz="1500" dirty="0"/>
           </a:p>
